--- a/decks/geog-asia-china/geog-asia-china_ch1_asia-megacities.pptx
+++ b/decks/geog-asia-china/geog-asia-china_ch1_asia-megacities.pptx
@@ -125,29 +125,29 @@
   <p:extLst>
     <p:ext uri="{521415D9-36F7-43E2-AB2F-B90AF26B5E84}">
       <p14:sectionLst xmlns:p14="http://schemas.microsoft.com/office/powerpoint/2010/main">
-        <p14:section name="Opening" id="{90425f1c-5640-1ee5-1dc6-af4d2c7f2821}">
+        <p14:section name="Opening" id="{3cef3900-6d1b-4e88-4ca0-46919cf6abea}">
           <p14:sldIdLst>
             <p14:sldId id="256"/>
           </p14:sldIdLst>
         </p14:section>
-        <p14:section name="Gate" id="{b958b2c9-808f-d739-211e-24429c04212e}">
+        <p14:section name="Gate" id="{91c05c5c-a217-8ce9-0637-65679e757f7a}">
           <p14:sldIdLst>
             <p14:sldId id="257"/>
             <p14:sldId id="258"/>
           </p14:sldIdLst>
         </p14:section>
-        <p14:section name="Pre-teach" id="{01a152bd-ad61-74c1-e420-d8b33c29e8fa}">
+        <p14:section name="Pre-teach" id="{8b340c14-f586-54d1-7dbc-d6d42798b1f5}">
           <p14:sldIdLst>
             <p14:sldId id="259"/>
           </p14:sldIdLst>
         </p14:section>
-        <p14:section name="Read-along" id="{3efac413-30b7-ef7b-e6f1-a99a30c5e11e}">
+        <p14:section name="Read-along" id="{142878a7-8bd5-36ed-6f65-ebc5c6b300f4}">
           <p14:sldIdLst>
             <p14:sldId id="260"/>
             <p14:sldId id="261"/>
           </p14:sldIdLst>
         </p14:section>
-        <p14:section name="Teach" id="{88e73e74-c07d-53fb-4131-864f83c4ed7e}">
+        <p14:section name="Teach" id="{1fb98f73-fd51-3566-79f2-50a2bc3adb28}">
           <p14:sldIdLst>
             <p14:sldId id="262"/>
             <p14:sldId id="263"/>
@@ -156,7 +156,7 @@
             <p14:sldId id="266"/>
           </p14:sldIdLst>
         </p14:section>
-        <p14:section name="Routes" id="{64205d62-aab6-f87c-6b17-edce4f469783}">
+        <p14:section name="Routes" id="{6f636f31-4217-3c30-9082-16bcb4805fdf}">
           <p14:sldIdLst>
             <p14:sldId id="267"/>
             <p14:sldId id="268"/>
@@ -164,12 +164,12 @@
             <p14:sldId id="270"/>
           </p14:sldIdLst>
         </p14:section>
-        <p14:section name="Close" id="{ed10df28-0d02-7cd3-9b6e-2d8e5fa3663e}">
+        <p14:section name="Close" id="{ec29bb79-ce2f-e133-72aa-0bb7785ec1ed}">
           <p14:sldIdLst>
             <p14:sldId id="271"/>
           </p14:sldIdLst>
         </p14:section>
-        <p14:section name="Answers" id="{c3f733ae-6ed8-818a-47b9-02afb58905cc}">
+        <p14:section name="Answers" id="{eb7d310f-927f-d0c7-cc9e-c4ea9ae2ef3d}">
           <p14:sldIdLst>
             <p14:sldId id="272"/>
             <p14:sldId id="273"/>
